--- a/examples/overview/build/overview_merged.pptx
+++ b/examples/overview/build/overview_merged.pptx
@@ -632,7 +632,7 @@
     </p:spTree>
     <p:extLst>
       <p:ext uri="{BB962C8B-B14F-4D97-AF65-F5344CB8AC3E}">
-        <p14:creationId xmlns:p14="http://schemas.microsoft.com/office/powerpoint/2010/main" val="4041392154"/>
+        <p14:creationId xmlns:p14="http://schemas.microsoft.com/office/powerpoint/2010/main" val="3158253160"/>
       </p:ext>
     </p:extLst>
   </p:cSld>
@@ -875,7 +875,7 @@
     </p:spTree>
     <p:extLst>
       <p:ext uri="{BB962C8B-B14F-4D97-AF65-F5344CB8AC3E}">
-        <p14:creationId xmlns:p14="http://schemas.microsoft.com/office/powerpoint/2010/main" val="664748684"/>
+        <p14:creationId xmlns:p14="http://schemas.microsoft.com/office/powerpoint/2010/main" val="3937028005"/>
       </p:ext>
     </p:extLst>
   </p:cSld>
@@ -1110,7 +1110,7 @@
     </p:spTree>
     <p:extLst>
       <p:ext uri="{BB962C8B-B14F-4D97-AF65-F5344CB8AC3E}">
-        <p14:creationId xmlns:p14="http://schemas.microsoft.com/office/powerpoint/2010/main" val="2276837677"/>
+        <p14:creationId xmlns:p14="http://schemas.microsoft.com/office/powerpoint/2010/main" val="2364268020"/>
       </p:ext>
     </p:extLst>
   </p:cSld>
@@ -1345,7 +1345,7 @@
     </p:spTree>
     <p:extLst>
       <p:ext uri="{BB962C8B-B14F-4D97-AF65-F5344CB8AC3E}">
-        <p14:creationId xmlns:p14="http://schemas.microsoft.com/office/powerpoint/2010/main" val="3082194577"/>
+        <p14:creationId xmlns:p14="http://schemas.microsoft.com/office/powerpoint/2010/main" val="3649482382"/>
       </p:ext>
     </p:extLst>
   </p:cSld>
@@ -1596,7 +1596,7 @@
     </p:spTree>
     <p:extLst>
       <p:ext uri="{BB962C8B-B14F-4D97-AF65-F5344CB8AC3E}">
-        <p14:creationId xmlns:p14="http://schemas.microsoft.com/office/powerpoint/2010/main" val="803948202"/>
+        <p14:creationId xmlns:p14="http://schemas.microsoft.com/office/powerpoint/2010/main" val="306918411"/>
       </p:ext>
     </p:extLst>
   </p:cSld>
@@ -1680,7 +1680,7 @@
     </p:spTree>
     <p:extLst>
       <p:ext uri="{BB962C8B-B14F-4D97-AF65-F5344CB8AC3E}">
-        <p14:creationId xmlns:p14="http://schemas.microsoft.com/office/powerpoint/2010/main" val="447183883"/>
+        <p14:creationId xmlns:p14="http://schemas.microsoft.com/office/powerpoint/2010/main" val="3925366560"/>
       </p:ext>
     </p:extLst>
   </p:cSld>
@@ -1896,7 +1896,7 @@
     </p:spTree>
     <p:extLst>
       <p:ext uri="{BB962C8B-B14F-4D97-AF65-F5344CB8AC3E}">
-        <p14:creationId xmlns:p14="http://schemas.microsoft.com/office/powerpoint/2010/main" val="3649571979"/>
+        <p14:creationId xmlns:p14="http://schemas.microsoft.com/office/powerpoint/2010/main" val="592359360"/>
       </p:ext>
     </p:extLst>
   </p:cSld>
@@ -1980,7 +1980,7 @@
     </p:spTree>
     <p:extLst>
       <p:ext uri="{BB962C8B-B14F-4D97-AF65-F5344CB8AC3E}">
-        <p14:creationId xmlns:p14="http://schemas.microsoft.com/office/powerpoint/2010/main" val="1414595992"/>
+        <p14:creationId xmlns:p14="http://schemas.microsoft.com/office/powerpoint/2010/main" val="3825862577"/>
       </p:ext>
     </p:extLst>
   </p:cSld>
@@ -2277,7 +2277,7 @@
     </p:spTree>
     <p:extLst>
       <p:ext uri="{BB962C8B-B14F-4D97-AF65-F5344CB8AC3E}">
-        <p14:creationId xmlns:p14="http://schemas.microsoft.com/office/powerpoint/2010/main" val="672572702"/>
+        <p14:creationId xmlns:p14="http://schemas.microsoft.com/office/powerpoint/2010/main" val="3516260833"/>
       </p:ext>
     </p:extLst>
   </p:cSld>
@@ -2600,7 +2600,7 @@
     </p:spTree>
     <p:extLst>
       <p:ext uri="{BB962C8B-B14F-4D97-AF65-F5344CB8AC3E}">
-        <p14:creationId xmlns:p14="http://schemas.microsoft.com/office/powerpoint/2010/main" val="3316816771"/>
+        <p14:creationId xmlns:p14="http://schemas.microsoft.com/office/powerpoint/2010/main" val="1349450098"/>
       </p:ext>
     </p:extLst>
   </p:cSld>
@@ -2821,7 +2821,7 @@
     </p:spTree>
     <p:extLst>
       <p:ext uri="{BB962C8B-B14F-4D97-AF65-F5344CB8AC3E}">
-        <p14:creationId xmlns:p14="http://schemas.microsoft.com/office/powerpoint/2010/main" val="1907205821"/>
+        <p14:creationId xmlns:p14="http://schemas.microsoft.com/office/powerpoint/2010/main" val="1028856750"/>
       </p:ext>
     </p:extLst>
   </p:cSld>
@@ -3083,7 +3083,7 @@
     </p:spTree>
     <p:extLst>
       <p:ext uri="{BB962C8B-B14F-4D97-AF65-F5344CB8AC3E}">
-        <p14:creationId xmlns:p14="http://schemas.microsoft.com/office/powerpoint/2010/main" val="2716784874"/>
+        <p14:creationId xmlns:p14="http://schemas.microsoft.com/office/powerpoint/2010/main" val="262333644"/>
       </p:ext>
     </p:extLst>
   </p:cSld>
@@ -3327,7 +3327,7 @@
     </p:spTree>
     <p:extLst>
       <p:ext uri="{BB962C8B-B14F-4D97-AF65-F5344CB8AC3E}">
-        <p14:creationId xmlns:p14="http://schemas.microsoft.com/office/powerpoint/2010/main" val="1238631330"/>
+        <p14:creationId xmlns:p14="http://schemas.microsoft.com/office/powerpoint/2010/main" val="3493257511"/>
       </p:ext>
     </p:extLst>
   </p:cSld>
@@ -3574,7 +3574,7 @@
     </p:spTree>
     <p:extLst>
       <p:ext uri="{BB962C8B-B14F-4D97-AF65-F5344CB8AC3E}">
-        <p14:creationId xmlns:p14="http://schemas.microsoft.com/office/powerpoint/2010/main" val="1317154684"/>
+        <p14:creationId xmlns:p14="http://schemas.microsoft.com/office/powerpoint/2010/main" val="1186980095"/>
       </p:ext>
     </p:extLst>
   </p:cSld>
@@ -4336,7 +4336,7 @@
     </p:spTree>
     <p:extLst>
       <p:ext uri="{BB962C8B-B14F-4D97-AF65-F5344CB8AC3E}">
-        <p14:creationId xmlns:p14="http://schemas.microsoft.com/office/powerpoint/2010/main" val="1899798533"/>
+        <p14:creationId xmlns:p14="http://schemas.microsoft.com/office/powerpoint/2010/main" val="3625476314"/>
       </p:ext>
     </p:extLst>
   </p:cSld>
@@ -4420,7 +4420,7 @@
     </p:spTree>
     <p:extLst>
       <p:ext uri="{BB962C8B-B14F-4D97-AF65-F5344CB8AC3E}">
-        <p14:creationId xmlns:p14="http://schemas.microsoft.com/office/powerpoint/2010/main" val="2649293219"/>
+        <p14:creationId xmlns:p14="http://schemas.microsoft.com/office/powerpoint/2010/main" val="770147967"/>
       </p:ext>
     </p:extLst>
   </p:cSld>
@@ -4679,7 +4679,7 @@
     </p:spTree>
     <p:extLst>
       <p:ext uri="{BB962C8B-B14F-4D97-AF65-F5344CB8AC3E}">
-        <p14:creationId xmlns:p14="http://schemas.microsoft.com/office/powerpoint/2010/main" val="1604706127"/>
+        <p14:creationId xmlns:p14="http://schemas.microsoft.com/office/powerpoint/2010/main" val="127461736"/>
       </p:ext>
     </p:extLst>
   </p:cSld>
@@ -4938,7 +4938,7 @@
     </p:spTree>
     <p:extLst>
       <p:ext uri="{BB962C8B-B14F-4D97-AF65-F5344CB8AC3E}">
-        <p14:creationId xmlns:p14="http://schemas.microsoft.com/office/powerpoint/2010/main" val="3048745867"/>
+        <p14:creationId xmlns:p14="http://schemas.microsoft.com/office/powerpoint/2010/main" val="2415890213"/>
       </p:ext>
     </p:extLst>
   </p:cSld>
@@ -5173,7 +5173,7 @@
     </p:spTree>
     <p:extLst>
       <p:ext uri="{BB962C8B-B14F-4D97-AF65-F5344CB8AC3E}">
-        <p14:creationId xmlns:p14="http://schemas.microsoft.com/office/powerpoint/2010/main" val="941190670"/>
+        <p14:creationId xmlns:p14="http://schemas.microsoft.com/office/powerpoint/2010/main" val="513686654"/>
       </p:ext>
     </p:extLst>
   </p:cSld>
@@ -5429,7 +5429,7 @@
     </p:spTree>
     <p:extLst>
       <p:ext uri="{BB962C8B-B14F-4D97-AF65-F5344CB8AC3E}">
-        <p14:creationId xmlns:p14="http://schemas.microsoft.com/office/powerpoint/2010/main" val="1734284017"/>
+        <p14:creationId xmlns:p14="http://schemas.microsoft.com/office/powerpoint/2010/main" val="402633138"/>
       </p:ext>
     </p:extLst>
   </p:cSld>
@@ -5513,7 +5513,7 @@
     </p:spTree>
     <p:extLst>
       <p:ext uri="{BB962C8B-B14F-4D97-AF65-F5344CB8AC3E}">
-        <p14:creationId xmlns:p14="http://schemas.microsoft.com/office/powerpoint/2010/main" val="1515028005"/>
+        <p14:creationId xmlns:p14="http://schemas.microsoft.com/office/powerpoint/2010/main" val="2173720258"/>
       </p:ext>
     </p:extLst>
   </p:cSld>
@@ -5756,7 +5756,7 @@
     </p:spTree>
     <p:extLst>
       <p:ext uri="{BB962C8B-B14F-4D97-AF65-F5344CB8AC3E}">
-        <p14:creationId xmlns:p14="http://schemas.microsoft.com/office/powerpoint/2010/main" val="1629317713"/>
+        <p14:creationId xmlns:p14="http://schemas.microsoft.com/office/powerpoint/2010/main" val="1496608231"/>
       </p:ext>
     </p:extLst>
   </p:cSld>
@@ -7788,7 +7788,7 @@
     </p:spTree>
     <p:extLst>
       <p:ext uri="{BB962C8B-B14F-4D97-AF65-F5344CB8AC3E}">
-        <p14:creationId xmlns:p14="http://schemas.microsoft.com/office/powerpoint/2010/main" val="3077967037"/>
+        <p14:creationId xmlns:p14="http://schemas.microsoft.com/office/powerpoint/2010/main" val="2292564069"/>
       </p:ext>
     </p:extLst>
   </p:cSld>
@@ -10109,7 +10109,7 @@
     </p:spTree>
     <p:extLst>
       <p:ext uri="{BB962C8B-B14F-4D97-AF65-F5344CB8AC3E}">
-        <p14:creationId xmlns:p14="http://schemas.microsoft.com/office/powerpoint/2010/main" val="1714230327"/>
+        <p14:creationId xmlns:p14="http://schemas.microsoft.com/office/powerpoint/2010/main" val="2107424492"/>
       </p:ext>
     </p:extLst>
   </p:cSld>
@@ -11698,7 +11698,7 @@
     </p:spTree>
     <p:extLst>
       <p:ext uri="{BB962C8B-B14F-4D97-AF65-F5344CB8AC3E}">
-        <p14:creationId xmlns:p14="http://schemas.microsoft.com/office/powerpoint/2010/main" val="116665457"/>
+        <p14:creationId xmlns:p14="http://schemas.microsoft.com/office/powerpoint/2010/main" val="4098104323"/>
       </p:ext>
     </p:extLst>
   </p:cSld>
@@ -12780,7 +12780,7 @@
     </p:spTree>
     <p:extLst>
       <p:ext uri="{BB962C8B-B14F-4D97-AF65-F5344CB8AC3E}">
-        <p14:creationId xmlns:p14="http://schemas.microsoft.com/office/powerpoint/2010/main" val="849113383"/>
+        <p14:creationId xmlns:p14="http://schemas.microsoft.com/office/powerpoint/2010/main" val="4175274334"/>
       </p:ext>
     </p:extLst>
   </p:cSld>
@@ -13784,7 +13784,7 @@
     </p:spTree>
     <p:extLst>
       <p:ext uri="{BB962C8B-B14F-4D97-AF65-F5344CB8AC3E}">
-        <p14:creationId xmlns:p14="http://schemas.microsoft.com/office/powerpoint/2010/main" val="2527158466"/>
+        <p14:creationId xmlns:p14="http://schemas.microsoft.com/office/powerpoint/2010/main" val="3520031570"/>
       </p:ext>
     </p:extLst>
   </p:cSld>
@@ -14009,7 +14009,7 @@
     </p:spTree>
     <p:extLst>
       <p:ext uri="{BB962C8B-B14F-4D97-AF65-F5344CB8AC3E}">
-        <p14:creationId xmlns:p14="http://schemas.microsoft.com/office/powerpoint/2010/main" val="134597865"/>
+        <p14:creationId xmlns:p14="http://schemas.microsoft.com/office/powerpoint/2010/main" val="4248488881"/>
       </p:ext>
     </p:extLst>
   </p:cSld>
@@ -16129,7 +16129,7 @@
     </p:spTree>
     <p:extLst>
       <p:ext uri="{BB962C8B-B14F-4D97-AF65-F5344CB8AC3E}">
-        <p14:creationId xmlns:p14="http://schemas.microsoft.com/office/powerpoint/2010/main" val="3772802293"/>
+        <p14:creationId xmlns:p14="http://schemas.microsoft.com/office/powerpoint/2010/main" val="677802291"/>
       </p:ext>
     </p:extLst>
   </p:cSld>
@@ -16261,7 +16261,7 @@
     </p:spTree>
     <p:extLst>
       <p:ext uri="{BB962C8B-B14F-4D97-AF65-F5344CB8AC3E}">
-        <p14:creationId xmlns:p14="http://schemas.microsoft.com/office/powerpoint/2010/main" val="2409410601"/>
+        <p14:creationId xmlns:p14="http://schemas.microsoft.com/office/powerpoint/2010/main" val="666212034"/>
       </p:ext>
     </p:extLst>
   </p:cSld>
@@ -16902,7 +16902,7 @@
     </p:spTree>
     <p:extLst>
       <p:ext uri="{BB962C8B-B14F-4D97-AF65-F5344CB8AC3E}">
-        <p14:creationId xmlns:p14="http://schemas.microsoft.com/office/powerpoint/2010/main" val="3258306464"/>
+        <p14:creationId xmlns:p14="http://schemas.microsoft.com/office/powerpoint/2010/main" val="643370028"/>
       </p:ext>
     </p:extLst>
   </p:cSld>
@@ -17389,7 +17389,7 @@
     </p:spTree>
     <p:extLst>
       <p:ext uri="{BB962C8B-B14F-4D97-AF65-F5344CB8AC3E}">
-        <p14:creationId xmlns:p14="http://schemas.microsoft.com/office/powerpoint/2010/main" val="25566893"/>
+        <p14:creationId xmlns:p14="http://schemas.microsoft.com/office/powerpoint/2010/main" val="663067434"/>
       </p:ext>
     </p:extLst>
   </p:cSld>
@@ -17763,7 +17763,7 @@
     </p:spTree>
     <p:extLst>
       <p:ext uri="{BB962C8B-B14F-4D97-AF65-F5344CB8AC3E}">
-        <p14:creationId xmlns:p14="http://schemas.microsoft.com/office/powerpoint/2010/main" val="210289333"/>
+        <p14:creationId xmlns:p14="http://schemas.microsoft.com/office/powerpoint/2010/main" val="586761192"/>
       </p:ext>
     </p:extLst>
   </p:cSld>
@@ -21183,7 +21183,7 @@
     </p:spTree>
     <p:extLst>
       <p:ext uri="{BB962C8B-B14F-4D97-AF65-F5344CB8AC3E}">
-        <p14:creationId xmlns:p14="http://schemas.microsoft.com/office/powerpoint/2010/main" val="2316775070"/>
+        <p14:creationId xmlns:p14="http://schemas.microsoft.com/office/powerpoint/2010/main" val="3782551394"/>
       </p:ext>
     </p:extLst>
   </p:cSld>
@@ -21709,7 +21709,7 @@
     </p:spTree>
     <p:extLst>
       <p:ext uri="{BB962C8B-B14F-4D97-AF65-F5344CB8AC3E}">
-        <p14:creationId xmlns:p14="http://schemas.microsoft.com/office/powerpoint/2010/main" val="1509978509"/>
+        <p14:creationId xmlns:p14="http://schemas.microsoft.com/office/powerpoint/2010/main" val="1012197082"/>
       </p:ext>
     </p:extLst>
   </p:cSld>
@@ -22280,7 +22280,7 @@
     </p:spTree>
     <p:extLst>
       <p:ext uri="{BB962C8B-B14F-4D97-AF65-F5344CB8AC3E}">
-        <p14:creationId xmlns:p14="http://schemas.microsoft.com/office/powerpoint/2010/main" val="2071119179"/>
+        <p14:creationId xmlns:p14="http://schemas.microsoft.com/office/powerpoint/2010/main" val="358347600"/>
       </p:ext>
     </p:extLst>
   </p:cSld>
@@ -22532,7 +22532,7 @@
     </p:spTree>
     <p:extLst>
       <p:ext uri="{BB962C8B-B14F-4D97-AF65-F5344CB8AC3E}">
-        <p14:creationId xmlns:p14="http://schemas.microsoft.com/office/powerpoint/2010/main" val="3923372353"/>
+        <p14:creationId xmlns:p14="http://schemas.microsoft.com/office/powerpoint/2010/main" val="4239080120"/>
       </p:ext>
     </p:extLst>
   </p:cSld>
@@ -22757,7 +22757,7 @@
     </p:spTree>
     <p:extLst>
       <p:ext uri="{BB962C8B-B14F-4D97-AF65-F5344CB8AC3E}">
-        <p14:creationId xmlns:p14="http://schemas.microsoft.com/office/powerpoint/2010/main" val="2347058223"/>
+        <p14:creationId xmlns:p14="http://schemas.microsoft.com/office/powerpoint/2010/main" val="3066885255"/>
       </p:ext>
     </p:extLst>
   </p:cSld>
@@ -23464,7 +23464,7 @@
     </p:spTree>
     <p:extLst>
       <p:ext uri="{BB962C8B-B14F-4D97-AF65-F5344CB8AC3E}">
-        <p14:creationId xmlns:p14="http://schemas.microsoft.com/office/powerpoint/2010/main" val="220355180"/>
+        <p14:creationId xmlns:p14="http://schemas.microsoft.com/office/powerpoint/2010/main" val="3754148383"/>
       </p:ext>
     </p:extLst>
   </p:cSld>
@@ -24744,7 +24744,7 @@
     </p:spTree>
     <p:extLst>
       <p:ext uri="{BB962C8B-B14F-4D97-AF65-F5344CB8AC3E}">
-        <p14:creationId xmlns:p14="http://schemas.microsoft.com/office/powerpoint/2010/main" val="1021966742"/>
+        <p14:creationId xmlns:p14="http://schemas.microsoft.com/office/powerpoint/2010/main" val="1292035727"/>
       </p:ext>
     </p:extLst>
   </p:cSld>
@@ -26115,7 +26115,7 @@
     </p:spTree>
     <p:extLst>
       <p:ext uri="{BB962C8B-B14F-4D97-AF65-F5344CB8AC3E}">
-        <p14:creationId xmlns:p14="http://schemas.microsoft.com/office/powerpoint/2010/main" val="1238487364"/>
+        <p14:creationId xmlns:p14="http://schemas.microsoft.com/office/powerpoint/2010/main" val="2002996244"/>
       </p:ext>
     </p:extLst>
   </p:cSld>
@@ -26891,7 +26891,7 @@
     </p:spTree>
     <p:extLst>
       <p:ext uri="{BB962C8B-B14F-4D97-AF65-F5344CB8AC3E}">
-        <p14:creationId xmlns:p14="http://schemas.microsoft.com/office/powerpoint/2010/main" val="1350588662"/>
+        <p14:creationId xmlns:p14="http://schemas.microsoft.com/office/powerpoint/2010/main" val="4005420773"/>
       </p:ext>
     </p:extLst>
   </p:cSld>
@@ -27192,7 +27192,7 @@
     </p:spTree>
     <p:extLst>
       <p:ext uri="{BB962C8B-B14F-4D97-AF65-F5344CB8AC3E}">
-        <p14:creationId xmlns:p14="http://schemas.microsoft.com/office/powerpoint/2010/main" val="2708701791"/>
+        <p14:creationId xmlns:p14="http://schemas.microsoft.com/office/powerpoint/2010/main" val="400203864"/>
       </p:ext>
     </p:extLst>
   </p:cSld>
@@ -29063,7 +29063,7 @@
     </p:spTree>
     <p:extLst>
       <p:ext uri="{BB962C8B-B14F-4D97-AF65-F5344CB8AC3E}">
-        <p14:creationId xmlns:p14="http://schemas.microsoft.com/office/powerpoint/2010/main" val="2929312712"/>
+        <p14:creationId xmlns:p14="http://schemas.microsoft.com/office/powerpoint/2010/main" val="3349073327"/>
       </p:ext>
     </p:extLst>
   </p:cSld>

--- a/examples/overview/build/overview_merged.pptx
+++ b/examples/overview/build/overview_merged.pptx
@@ -259,7 +259,7 @@
           <a:p>
             <a:fld id="{294670BC-B8C6-44A7-84E1-23632D8FD86F}" type="datetimeFigureOut">
               <a:rPr kumimoji="1" lang="ja-JP" altLang="en-US" smtClean="0"/>
-              <a:t>2026/6/4</a:t>
+              <a:t>2026/6/5</a:t>
             </a:fld>
             <a:endParaRPr kumimoji="1" lang="ja-JP" altLang="en-US"/>
           </a:p>
@@ -632,7 +632,7 @@
     </p:spTree>
     <p:extLst>
       <p:ext uri="{BB962C8B-B14F-4D97-AF65-F5344CB8AC3E}">
-        <p14:creationId xmlns:p14="http://schemas.microsoft.com/office/powerpoint/2010/main" val="3158253160"/>
+        <p14:creationId xmlns:p14="http://schemas.microsoft.com/office/powerpoint/2010/main" val="3156427937"/>
       </p:ext>
     </p:extLst>
   </p:cSld>
@@ -875,7 +875,7 @@
     </p:spTree>
     <p:extLst>
       <p:ext uri="{BB962C8B-B14F-4D97-AF65-F5344CB8AC3E}">
-        <p14:creationId xmlns:p14="http://schemas.microsoft.com/office/powerpoint/2010/main" val="3937028005"/>
+        <p14:creationId xmlns:p14="http://schemas.microsoft.com/office/powerpoint/2010/main" val="1248381262"/>
       </p:ext>
     </p:extLst>
   </p:cSld>
@@ -1110,7 +1110,7 @@
     </p:spTree>
     <p:extLst>
       <p:ext uri="{BB962C8B-B14F-4D97-AF65-F5344CB8AC3E}">
-        <p14:creationId xmlns:p14="http://schemas.microsoft.com/office/powerpoint/2010/main" val="2364268020"/>
+        <p14:creationId xmlns:p14="http://schemas.microsoft.com/office/powerpoint/2010/main" val="1819556148"/>
       </p:ext>
     </p:extLst>
   </p:cSld>
@@ -1345,7 +1345,7 @@
     </p:spTree>
     <p:extLst>
       <p:ext uri="{BB962C8B-B14F-4D97-AF65-F5344CB8AC3E}">
-        <p14:creationId xmlns:p14="http://schemas.microsoft.com/office/powerpoint/2010/main" val="3649482382"/>
+        <p14:creationId xmlns:p14="http://schemas.microsoft.com/office/powerpoint/2010/main" val="2767757667"/>
       </p:ext>
     </p:extLst>
   </p:cSld>
@@ -1596,7 +1596,7 @@
     </p:spTree>
     <p:extLst>
       <p:ext uri="{BB962C8B-B14F-4D97-AF65-F5344CB8AC3E}">
-        <p14:creationId xmlns:p14="http://schemas.microsoft.com/office/powerpoint/2010/main" val="306918411"/>
+        <p14:creationId xmlns:p14="http://schemas.microsoft.com/office/powerpoint/2010/main" val="2799787098"/>
       </p:ext>
     </p:extLst>
   </p:cSld>
@@ -1680,7 +1680,7 @@
     </p:spTree>
     <p:extLst>
       <p:ext uri="{BB962C8B-B14F-4D97-AF65-F5344CB8AC3E}">
-        <p14:creationId xmlns:p14="http://schemas.microsoft.com/office/powerpoint/2010/main" val="3925366560"/>
+        <p14:creationId xmlns:p14="http://schemas.microsoft.com/office/powerpoint/2010/main" val="4159529389"/>
       </p:ext>
     </p:extLst>
   </p:cSld>
@@ -1896,7 +1896,7 @@
     </p:spTree>
     <p:extLst>
       <p:ext uri="{BB962C8B-B14F-4D97-AF65-F5344CB8AC3E}">
-        <p14:creationId xmlns:p14="http://schemas.microsoft.com/office/powerpoint/2010/main" val="592359360"/>
+        <p14:creationId xmlns:p14="http://schemas.microsoft.com/office/powerpoint/2010/main" val="405670796"/>
       </p:ext>
     </p:extLst>
   </p:cSld>
@@ -1980,7 +1980,7 @@
     </p:spTree>
     <p:extLst>
       <p:ext uri="{BB962C8B-B14F-4D97-AF65-F5344CB8AC3E}">
-        <p14:creationId xmlns:p14="http://schemas.microsoft.com/office/powerpoint/2010/main" val="3825862577"/>
+        <p14:creationId xmlns:p14="http://schemas.microsoft.com/office/powerpoint/2010/main" val="1889589363"/>
       </p:ext>
     </p:extLst>
   </p:cSld>
@@ -2277,7 +2277,7 @@
     </p:spTree>
     <p:extLst>
       <p:ext uri="{BB962C8B-B14F-4D97-AF65-F5344CB8AC3E}">
-        <p14:creationId xmlns:p14="http://schemas.microsoft.com/office/powerpoint/2010/main" val="3516260833"/>
+        <p14:creationId xmlns:p14="http://schemas.microsoft.com/office/powerpoint/2010/main" val="2742042828"/>
       </p:ext>
     </p:extLst>
   </p:cSld>
@@ -2600,7 +2600,7 @@
     </p:spTree>
     <p:extLst>
       <p:ext uri="{BB962C8B-B14F-4D97-AF65-F5344CB8AC3E}">
-        <p14:creationId xmlns:p14="http://schemas.microsoft.com/office/powerpoint/2010/main" val="1349450098"/>
+        <p14:creationId xmlns:p14="http://schemas.microsoft.com/office/powerpoint/2010/main" val="3062488709"/>
       </p:ext>
     </p:extLst>
   </p:cSld>
@@ -2821,7 +2821,7 @@
     </p:spTree>
     <p:extLst>
       <p:ext uri="{BB962C8B-B14F-4D97-AF65-F5344CB8AC3E}">
-        <p14:creationId xmlns:p14="http://schemas.microsoft.com/office/powerpoint/2010/main" val="1028856750"/>
+        <p14:creationId xmlns:p14="http://schemas.microsoft.com/office/powerpoint/2010/main" val="2874664790"/>
       </p:ext>
     </p:extLst>
   </p:cSld>
@@ -3040,7 +3040,7 @@
           </a:p>
           <a:p>
             <a:r>
-              <a:t>ただし、現時点での機能解説は PPTX をマージ生成する例のみで、MD,PDF,HTML 等の他形式文書を生成する例の解説は作っておりません。機能としては動いていますが設定が複雑なため、ドキュメントを書くのに少し時間がかかる見込みです。（[仕様書](docs/md_merge_spec.md)はありますが、これを読んで使い方が分かるかというと難しいです）</a:t>
+              <a:t>ただし、現時点での機能解説は PPTX をマージ生成する例のみで、MD,PDF,HTML 等の他形式文書を生成する例の解説は作っておりません。機能としては動いていますが設定が複雑なため、ドキュメントを書くのに少し時間がかかる見込みです。（[仕様書](/docs/md_merge_spec.md)はありますが、これを読んで使い方が分かるかというと難しいです）</a:t>
             </a:r>
           </a:p>
           <a:p>
@@ -3083,7 +3083,7 @@
     </p:spTree>
     <p:extLst>
       <p:ext uri="{BB962C8B-B14F-4D97-AF65-F5344CB8AC3E}">
-        <p14:creationId xmlns:p14="http://schemas.microsoft.com/office/powerpoint/2010/main" val="262333644"/>
+        <p14:creationId xmlns:p14="http://schemas.microsoft.com/office/powerpoint/2010/main" val="2812952713"/>
       </p:ext>
     </p:extLst>
   </p:cSld>
@@ -3327,7 +3327,7 @@
     </p:spTree>
     <p:extLst>
       <p:ext uri="{BB962C8B-B14F-4D97-AF65-F5344CB8AC3E}">
-        <p14:creationId xmlns:p14="http://schemas.microsoft.com/office/powerpoint/2010/main" val="3493257511"/>
+        <p14:creationId xmlns:p14="http://schemas.microsoft.com/office/powerpoint/2010/main" val="672131496"/>
       </p:ext>
     </p:extLst>
   </p:cSld>
@@ -3574,7 +3574,7 @@
     </p:spTree>
     <p:extLst>
       <p:ext uri="{BB962C8B-B14F-4D97-AF65-F5344CB8AC3E}">
-        <p14:creationId xmlns:p14="http://schemas.microsoft.com/office/powerpoint/2010/main" val="1186980095"/>
+        <p14:creationId xmlns:p14="http://schemas.microsoft.com/office/powerpoint/2010/main" val="681299204"/>
       </p:ext>
     </p:extLst>
   </p:cSld>
@@ -4336,7 +4336,7 @@
     </p:spTree>
     <p:extLst>
       <p:ext uri="{BB962C8B-B14F-4D97-AF65-F5344CB8AC3E}">
-        <p14:creationId xmlns:p14="http://schemas.microsoft.com/office/powerpoint/2010/main" val="3625476314"/>
+        <p14:creationId xmlns:p14="http://schemas.microsoft.com/office/powerpoint/2010/main" val="11039717"/>
       </p:ext>
     </p:extLst>
   </p:cSld>
@@ -4420,7 +4420,7 @@
     </p:spTree>
     <p:extLst>
       <p:ext uri="{BB962C8B-B14F-4D97-AF65-F5344CB8AC3E}">
-        <p14:creationId xmlns:p14="http://schemas.microsoft.com/office/powerpoint/2010/main" val="770147967"/>
+        <p14:creationId xmlns:p14="http://schemas.microsoft.com/office/powerpoint/2010/main" val="3781724120"/>
       </p:ext>
     </p:extLst>
   </p:cSld>
@@ -4679,7 +4679,7 @@
     </p:spTree>
     <p:extLst>
       <p:ext uri="{BB962C8B-B14F-4D97-AF65-F5344CB8AC3E}">
-        <p14:creationId xmlns:p14="http://schemas.microsoft.com/office/powerpoint/2010/main" val="127461736"/>
+        <p14:creationId xmlns:p14="http://schemas.microsoft.com/office/powerpoint/2010/main" val="259211908"/>
       </p:ext>
     </p:extLst>
   </p:cSld>
@@ -4938,7 +4938,7 @@
     </p:spTree>
     <p:extLst>
       <p:ext uri="{BB962C8B-B14F-4D97-AF65-F5344CB8AC3E}">
-        <p14:creationId xmlns:p14="http://schemas.microsoft.com/office/powerpoint/2010/main" val="2415890213"/>
+        <p14:creationId xmlns:p14="http://schemas.microsoft.com/office/powerpoint/2010/main" val="1142466811"/>
       </p:ext>
     </p:extLst>
   </p:cSld>
@@ -5173,7 +5173,7 @@
     </p:spTree>
     <p:extLst>
       <p:ext uri="{BB962C8B-B14F-4D97-AF65-F5344CB8AC3E}">
-        <p14:creationId xmlns:p14="http://schemas.microsoft.com/office/powerpoint/2010/main" val="513686654"/>
+        <p14:creationId xmlns:p14="http://schemas.microsoft.com/office/powerpoint/2010/main" val="2994815580"/>
       </p:ext>
     </p:extLst>
   </p:cSld>
@@ -5429,7 +5429,7 @@
     </p:spTree>
     <p:extLst>
       <p:ext uri="{BB962C8B-B14F-4D97-AF65-F5344CB8AC3E}">
-        <p14:creationId xmlns:p14="http://schemas.microsoft.com/office/powerpoint/2010/main" val="402633138"/>
+        <p14:creationId xmlns:p14="http://schemas.microsoft.com/office/powerpoint/2010/main" val="1045812137"/>
       </p:ext>
     </p:extLst>
   </p:cSld>
@@ -5513,7 +5513,7 @@
     </p:spTree>
     <p:extLst>
       <p:ext uri="{BB962C8B-B14F-4D97-AF65-F5344CB8AC3E}">
-        <p14:creationId xmlns:p14="http://schemas.microsoft.com/office/powerpoint/2010/main" val="2173720258"/>
+        <p14:creationId xmlns:p14="http://schemas.microsoft.com/office/powerpoint/2010/main" val="1969996952"/>
       </p:ext>
     </p:extLst>
   </p:cSld>
@@ -5756,7 +5756,7 @@
     </p:spTree>
     <p:extLst>
       <p:ext uri="{BB962C8B-B14F-4D97-AF65-F5344CB8AC3E}">
-        <p14:creationId xmlns:p14="http://schemas.microsoft.com/office/powerpoint/2010/main" val="1496608231"/>
+        <p14:creationId xmlns:p14="http://schemas.microsoft.com/office/powerpoint/2010/main" val="3759343101"/>
       </p:ext>
     </p:extLst>
   </p:cSld>
@@ -7788,7 +7788,7 @@
     </p:spTree>
     <p:extLst>
       <p:ext uri="{BB962C8B-B14F-4D97-AF65-F5344CB8AC3E}">
-        <p14:creationId xmlns:p14="http://schemas.microsoft.com/office/powerpoint/2010/main" val="2292564069"/>
+        <p14:creationId xmlns:p14="http://schemas.microsoft.com/office/powerpoint/2010/main" val="1164674089"/>
       </p:ext>
     </p:extLst>
   </p:cSld>
@@ -10109,7 +10109,7 @@
     </p:spTree>
     <p:extLst>
       <p:ext uri="{BB962C8B-B14F-4D97-AF65-F5344CB8AC3E}">
-        <p14:creationId xmlns:p14="http://schemas.microsoft.com/office/powerpoint/2010/main" val="2107424492"/>
+        <p14:creationId xmlns:p14="http://schemas.microsoft.com/office/powerpoint/2010/main" val="3749405722"/>
       </p:ext>
     </p:extLst>
   </p:cSld>
@@ -11698,7 +11698,7 @@
     </p:spTree>
     <p:extLst>
       <p:ext uri="{BB962C8B-B14F-4D97-AF65-F5344CB8AC3E}">
-        <p14:creationId xmlns:p14="http://schemas.microsoft.com/office/powerpoint/2010/main" val="4098104323"/>
+        <p14:creationId xmlns:p14="http://schemas.microsoft.com/office/powerpoint/2010/main" val="1317386393"/>
       </p:ext>
     </p:extLst>
   </p:cSld>
@@ -12780,7 +12780,7 @@
     </p:spTree>
     <p:extLst>
       <p:ext uri="{BB962C8B-B14F-4D97-AF65-F5344CB8AC3E}">
-        <p14:creationId xmlns:p14="http://schemas.microsoft.com/office/powerpoint/2010/main" val="4175274334"/>
+        <p14:creationId xmlns:p14="http://schemas.microsoft.com/office/powerpoint/2010/main" val="3482579596"/>
       </p:ext>
     </p:extLst>
   </p:cSld>
@@ -13784,7 +13784,7 @@
     </p:spTree>
     <p:extLst>
       <p:ext uri="{BB962C8B-B14F-4D97-AF65-F5344CB8AC3E}">
-        <p14:creationId xmlns:p14="http://schemas.microsoft.com/office/powerpoint/2010/main" val="3520031570"/>
+        <p14:creationId xmlns:p14="http://schemas.microsoft.com/office/powerpoint/2010/main" val="3036933855"/>
       </p:ext>
     </p:extLst>
   </p:cSld>
@@ -14009,7 +14009,7 @@
     </p:spTree>
     <p:extLst>
       <p:ext uri="{BB962C8B-B14F-4D97-AF65-F5344CB8AC3E}">
-        <p14:creationId xmlns:p14="http://schemas.microsoft.com/office/powerpoint/2010/main" val="4248488881"/>
+        <p14:creationId xmlns:p14="http://schemas.microsoft.com/office/powerpoint/2010/main" val="3432986911"/>
       </p:ext>
     </p:extLst>
   </p:cSld>
@@ -16129,7 +16129,7 @@
     </p:spTree>
     <p:extLst>
       <p:ext uri="{BB962C8B-B14F-4D97-AF65-F5344CB8AC3E}">
-        <p14:creationId xmlns:p14="http://schemas.microsoft.com/office/powerpoint/2010/main" val="677802291"/>
+        <p14:creationId xmlns:p14="http://schemas.microsoft.com/office/powerpoint/2010/main" val="3532319560"/>
       </p:ext>
     </p:extLst>
   </p:cSld>
@@ -16261,7 +16261,7 @@
     </p:spTree>
     <p:extLst>
       <p:ext uri="{BB962C8B-B14F-4D97-AF65-F5344CB8AC3E}">
-        <p14:creationId xmlns:p14="http://schemas.microsoft.com/office/powerpoint/2010/main" val="666212034"/>
+        <p14:creationId xmlns:p14="http://schemas.microsoft.com/office/powerpoint/2010/main" val="2687726921"/>
       </p:ext>
     </p:extLst>
   </p:cSld>
@@ -16902,7 +16902,7 @@
     </p:spTree>
     <p:extLst>
       <p:ext uri="{BB962C8B-B14F-4D97-AF65-F5344CB8AC3E}">
-        <p14:creationId xmlns:p14="http://schemas.microsoft.com/office/powerpoint/2010/main" val="643370028"/>
+        <p14:creationId xmlns:p14="http://schemas.microsoft.com/office/powerpoint/2010/main" val="2430145873"/>
       </p:ext>
     </p:extLst>
   </p:cSld>
@@ -17389,7 +17389,7 @@
     </p:spTree>
     <p:extLst>
       <p:ext uri="{BB962C8B-B14F-4D97-AF65-F5344CB8AC3E}">
-        <p14:creationId xmlns:p14="http://schemas.microsoft.com/office/powerpoint/2010/main" val="663067434"/>
+        <p14:creationId xmlns:p14="http://schemas.microsoft.com/office/powerpoint/2010/main" val="1308351785"/>
       </p:ext>
     </p:extLst>
   </p:cSld>
@@ -17763,7 +17763,7 @@
     </p:spTree>
     <p:extLst>
       <p:ext uri="{BB962C8B-B14F-4D97-AF65-F5344CB8AC3E}">
-        <p14:creationId xmlns:p14="http://schemas.microsoft.com/office/powerpoint/2010/main" val="586761192"/>
+        <p14:creationId xmlns:p14="http://schemas.microsoft.com/office/powerpoint/2010/main" val="123644695"/>
       </p:ext>
     </p:extLst>
   </p:cSld>
@@ -21183,7 +21183,7 @@
     </p:spTree>
     <p:extLst>
       <p:ext uri="{BB962C8B-B14F-4D97-AF65-F5344CB8AC3E}">
-        <p14:creationId xmlns:p14="http://schemas.microsoft.com/office/powerpoint/2010/main" val="3782551394"/>
+        <p14:creationId xmlns:p14="http://schemas.microsoft.com/office/powerpoint/2010/main" val="1716930676"/>
       </p:ext>
     </p:extLst>
   </p:cSld>
@@ -21709,7 +21709,7 @@
     </p:spTree>
     <p:extLst>
       <p:ext uri="{BB962C8B-B14F-4D97-AF65-F5344CB8AC3E}">
-        <p14:creationId xmlns:p14="http://schemas.microsoft.com/office/powerpoint/2010/main" val="1012197082"/>
+        <p14:creationId xmlns:p14="http://schemas.microsoft.com/office/powerpoint/2010/main" val="3090339507"/>
       </p:ext>
     </p:extLst>
   </p:cSld>
@@ -22280,7 +22280,7 @@
     </p:spTree>
     <p:extLst>
       <p:ext uri="{BB962C8B-B14F-4D97-AF65-F5344CB8AC3E}">
-        <p14:creationId xmlns:p14="http://schemas.microsoft.com/office/powerpoint/2010/main" val="358347600"/>
+        <p14:creationId xmlns:p14="http://schemas.microsoft.com/office/powerpoint/2010/main" val="4039397535"/>
       </p:ext>
     </p:extLst>
   </p:cSld>
@@ -22532,7 +22532,7 @@
     </p:spTree>
     <p:extLst>
       <p:ext uri="{BB962C8B-B14F-4D97-AF65-F5344CB8AC3E}">
-        <p14:creationId xmlns:p14="http://schemas.microsoft.com/office/powerpoint/2010/main" val="4239080120"/>
+        <p14:creationId xmlns:p14="http://schemas.microsoft.com/office/powerpoint/2010/main" val="3215792440"/>
       </p:ext>
     </p:extLst>
   </p:cSld>
@@ -22757,7 +22757,7 @@
     </p:spTree>
     <p:extLst>
       <p:ext uri="{BB962C8B-B14F-4D97-AF65-F5344CB8AC3E}">
-        <p14:creationId xmlns:p14="http://schemas.microsoft.com/office/powerpoint/2010/main" val="3066885255"/>
+        <p14:creationId xmlns:p14="http://schemas.microsoft.com/office/powerpoint/2010/main" val="4095545085"/>
       </p:ext>
     </p:extLst>
   </p:cSld>
@@ -23464,7 +23464,7 @@
     </p:spTree>
     <p:extLst>
       <p:ext uri="{BB962C8B-B14F-4D97-AF65-F5344CB8AC3E}">
-        <p14:creationId xmlns:p14="http://schemas.microsoft.com/office/powerpoint/2010/main" val="3754148383"/>
+        <p14:creationId xmlns:p14="http://schemas.microsoft.com/office/powerpoint/2010/main" val="3557379486"/>
       </p:ext>
     </p:extLst>
   </p:cSld>
@@ -24744,7 +24744,7 @@
     </p:spTree>
     <p:extLst>
       <p:ext uri="{BB962C8B-B14F-4D97-AF65-F5344CB8AC3E}">
-        <p14:creationId xmlns:p14="http://schemas.microsoft.com/office/powerpoint/2010/main" val="1292035727"/>
+        <p14:creationId xmlns:p14="http://schemas.microsoft.com/office/powerpoint/2010/main" val="1858091092"/>
       </p:ext>
     </p:extLst>
   </p:cSld>
@@ -26115,7 +26115,7 @@
     </p:spTree>
     <p:extLst>
       <p:ext uri="{BB962C8B-B14F-4D97-AF65-F5344CB8AC3E}">
-        <p14:creationId xmlns:p14="http://schemas.microsoft.com/office/powerpoint/2010/main" val="2002996244"/>
+        <p14:creationId xmlns:p14="http://schemas.microsoft.com/office/powerpoint/2010/main" val="719055057"/>
       </p:ext>
     </p:extLst>
   </p:cSld>
@@ -26891,7 +26891,7 @@
     </p:spTree>
     <p:extLst>
       <p:ext uri="{BB962C8B-B14F-4D97-AF65-F5344CB8AC3E}">
-        <p14:creationId xmlns:p14="http://schemas.microsoft.com/office/powerpoint/2010/main" val="4005420773"/>
+        <p14:creationId xmlns:p14="http://schemas.microsoft.com/office/powerpoint/2010/main" val="2387673388"/>
       </p:ext>
     </p:extLst>
   </p:cSld>
@@ -27192,7 +27192,7 @@
     </p:spTree>
     <p:extLst>
       <p:ext uri="{BB962C8B-B14F-4D97-AF65-F5344CB8AC3E}">
-        <p14:creationId xmlns:p14="http://schemas.microsoft.com/office/powerpoint/2010/main" val="400203864"/>
+        <p14:creationId xmlns:p14="http://schemas.microsoft.com/office/powerpoint/2010/main" val="2294035863"/>
       </p:ext>
     </p:extLst>
   </p:cSld>
@@ -29063,7 +29063,7 @@
     </p:spTree>
     <p:extLst>
       <p:ext uri="{BB962C8B-B14F-4D97-AF65-F5344CB8AC3E}">
-        <p14:creationId xmlns:p14="http://schemas.microsoft.com/office/powerpoint/2010/main" val="3349073327"/>
+        <p14:creationId xmlns:p14="http://schemas.microsoft.com/office/powerpoint/2010/main" val="1102258696"/>
       </p:ext>
     </p:extLst>
   </p:cSld>

--- a/examples/overview/build/overview_merged.pptx
+++ b/examples/overview/build/overview_merged.pptx
@@ -259,7 +259,7 @@
           <a:p>
             <a:fld id="{294670BC-B8C6-44A7-84E1-23632D8FD86F}" type="datetimeFigureOut">
               <a:rPr kumimoji="1" lang="ja-JP" altLang="en-US" smtClean="0"/>
-              <a:t>2026/6/5</a:t>
+              <a:t>2026/6/6</a:t>
             </a:fld>
             <a:endParaRPr kumimoji="1" lang="ja-JP" altLang="en-US"/>
           </a:p>
@@ -632,7 +632,7 @@
     </p:spTree>
     <p:extLst>
       <p:ext uri="{BB962C8B-B14F-4D97-AF65-F5344CB8AC3E}">
-        <p14:creationId xmlns:p14="http://schemas.microsoft.com/office/powerpoint/2010/main" val="3156427937"/>
+        <p14:creationId xmlns:p14="http://schemas.microsoft.com/office/powerpoint/2010/main" val="2014503563"/>
       </p:ext>
     </p:extLst>
   </p:cSld>
@@ -875,7 +875,7 @@
     </p:spTree>
     <p:extLst>
       <p:ext uri="{BB962C8B-B14F-4D97-AF65-F5344CB8AC3E}">
-        <p14:creationId xmlns:p14="http://schemas.microsoft.com/office/powerpoint/2010/main" val="1248381262"/>
+        <p14:creationId xmlns:p14="http://schemas.microsoft.com/office/powerpoint/2010/main" val="2707100404"/>
       </p:ext>
     </p:extLst>
   </p:cSld>
@@ -1110,7 +1110,7 @@
     </p:spTree>
     <p:extLst>
       <p:ext uri="{BB962C8B-B14F-4D97-AF65-F5344CB8AC3E}">
-        <p14:creationId xmlns:p14="http://schemas.microsoft.com/office/powerpoint/2010/main" val="1819556148"/>
+        <p14:creationId xmlns:p14="http://schemas.microsoft.com/office/powerpoint/2010/main" val="2851158432"/>
       </p:ext>
     </p:extLst>
   </p:cSld>
@@ -1345,7 +1345,7 @@
     </p:spTree>
     <p:extLst>
       <p:ext uri="{BB962C8B-B14F-4D97-AF65-F5344CB8AC3E}">
-        <p14:creationId xmlns:p14="http://schemas.microsoft.com/office/powerpoint/2010/main" val="2767757667"/>
+        <p14:creationId xmlns:p14="http://schemas.microsoft.com/office/powerpoint/2010/main" val="2429889435"/>
       </p:ext>
     </p:extLst>
   </p:cSld>
@@ -1596,7 +1596,7 @@
     </p:spTree>
     <p:extLst>
       <p:ext uri="{BB962C8B-B14F-4D97-AF65-F5344CB8AC3E}">
-        <p14:creationId xmlns:p14="http://schemas.microsoft.com/office/powerpoint/2010/main" val="2799787098"/>
+        <p14:creationId xmlns:p14="http://schemas.microsoft.com/office/powerpoint/2010/main" val="1486169010"/>
       </p:ext>
     </p:extLst>
   </p:cSld>
@@ -1680,7 +1680,7 @@
     </p:spTree>
     <p:extLst>
       <p:ext uri="{BB962C8B-B14F-4D97-AF65-F5344CB8AC3E}">
-        <p14:creationId xmlns:p14="http://schemas.microsoft.com/office/powerpoint/2010/main" val="4159529389"/>
+        <p14:creationId xmlns:p14="http://schemas.microsoft.com/office/powerpoint/2010/main" val="2425994446"/>
       </p:ext>
     </p:extLst>
   </p:cSld>
@@ -1896,7 +1896,7 @@
     </p:spTree>
     <p:extLst>
       <p:ext uri="{BB962C8B-B14F-4D97-AF65-F5344CB8AC3E}">
-        <p14:creationId xmlns:p14="http://schemas.microsoft.com/office/powerpoint/2010/main" val="405670796"/>
+        <p14:creationId xmlns:p14="http://schemas.microsoft.com/office/powerpoint/2010/main" val="3285141661"/>
       </p:ext>
     </p:extLst>
   </p:cSld>
@@ -1980,7 +1980,7 @@
     </p:spTree>
     <p:extLst>
       <p:ext uri="{BB962C8B-B14F-4D97-AF65-F5344CB8AC3E}">
-        <p14:creationId xmlns:p14="http://schemas.microsoft.com/office/powerpoint/2010/main" val="1889589363"/>
+        <p14:creationId xmlns:p14="http://schemas.microsoft.com/office/powerpoint/2010/main" val="1414844486"/>
       </p:ext>
     </p:extLst>
   </p:cSld>
@@ -2277,7 +2277,7 @@
     </p:spTree>
     <p:extLst>
       <p:ext uri="{BB962C8B-B14F-4D97-AF65-F5344CB8AC3E}">
-        <p14:creationId xmlns:p14="http://schemas.microsoft.com/office/powerpoint/2010/main" val="2742042828"/>
+        <p14:creationId xmlns:p14="http://schemas.microsoft.com/office/powerpoint/2010/main" val="2393990553"/>
       </p:ext>
     </p:extLst>
   </p:cSld>
@@ -2600,7 +2600,7 @@
     </p:spTree>
     <p:extLst>
       <p:ext uri="{BB962C8B-B14F-4D97-AF65-F5344CB8AC3E}">
-        <p14:creationId xmlns:p14="http://schemas.microsoft.com/office/powerpoint/2010/main" val="3062488709"/>
+        <p14:creationId xmlns:p14="http://schemas.microsoft.com/office/powerpoint/2010/main" val="3508612804"/>
       </p:ext>
     </p:extLst>
   </p:cSld>
@@ -2821,7 +2821,7 @@
     </p:spTree>
     <p:extLst>
       <p:ext uri="{BB962C8B-B14F-4D97-AF65-F5344CB8AC3E}">
-        <p14:creationId xmlns:p14="http://schemas.microsoft.com/office/powerpoint/2010/main" val="2874664790"/>
+        <p14:creationId xmlns:p14="http://schemas.microsoft.com/office/powerpoint/2010/main" val="3074624130"/>
       </p:ext>
     </p:extLst>
   </p:cSld>
@@ -3083,7 +3083,7 @@
     </p:spTree>
     <p:extLst>
       <p:ext uri="{BB962C8B-B14F-4D97-AF65-F5344CB8AC3E}">
-        <p14:creationId xmlns:p14="http://schemas.microsoft.com/office/powerpoint/2010/main" val="2812952713"/>
+        <p14:creationId xmlns:p14="http://schemas.microsoft.com/office/powerpoint/2010/main" val="1596402002"/>
       </p:ext>
     </p:extLst>
   </p:cSld>
@@ -3327,7 +3327,7 @@
     </p:spTree>
     <p:extLst>
       <p:ext uri="{BB962C8B-B14F-4D97-AF65-F5344CB8AC3E}">
-        <p14:creationId xmlns:p14="http://schemas.microsoft.com/office/powerpoint/2010/main" val="672131496"/>
+        <p14:creationId xmlns:p14="http://schemas.microsoft.com/office/powerpoint/2010/main" val="1607471164"/>
       </p:ext>
     </p:extLst>
   </p:cSld>
@@ -3574,7 +3574,7 @@
     </p:spTree>
     <p:extLst>
       <p:ext uri="{BB962C8B-B14F-4D97-AF65-F5344CB8AC3E}">
-        <p14:creationId xmlns:p14="http://schemas.microsoft.com/office/powerpoint/2010/main" val="681299204"/>
+        <p14:creationId xmlns:p14="http://schemas.microsoft.com/office/powerpoint/2010/main" val="2875019006"/>
       </p:ext>
     </p:extLst>
   </p:cSld>
@@ -4336,7 +4336,7 @@
     </p:spTree>
     <p:extLst>
       <p:ext uri="{BB962C8B-B14F-4D97-AF65-F5344CB8AC3E}">
-        <p14:creationId xmlns:p14="http://schemas.microsoft.com/office/powerpoint/2010/main" val="11039717"/>
+        <p14:creationId xmlns:p14="http://schemas.microsoft.com/office/powerpoint/2010/main" val="1885675830"/>
       </p:ext>
     </p:extLst>
   </p:cSld>
@@ -4420,7 +4420,7 @@
     </p:spTree>
     <p:extLst>
       <p:ext uri="{BB962C8B-B14F-4D97-AF65-F5344CB8AC3E}">
-        <p14:creationId xmlns:p14="http://schemas.microsoft.com/office/powerpoint/2010/main" val="3781724120"/>
+        <p14:creationId xmlns:p14="http://schemas.microsoft.com/office/powerpoint/2010/main" val="1161217434"/>
       </p:ext>
     </p:extLst>
   </p:cSld>
@@ -4679,7 +4679,7 @@
     </p:spTree>
     <p:extLst>
       <p:ext uri="{BB962C8B-B14F-4D97-AF65-F5344CB8AC3E}">
-        <p14:creationId xmlns:p14="http://schemas.microsoft.com/office/powerpoint/2010/main" val="259211908"/>
+        <p14:creationId xmlns:p14="http://schemas.microsoft.com/office/powerpoint/2010/main" val="1838537098"/>
       </p:ext>
     </p:extLst>
   </p:cSld>
@@ -4938,7 +4938,7 @@
     </p:spTree>
     <p:extLst>
       <p:ext uri="{BB962C8B-B14F-4D97-AF65-F5344CB8AC3E}">
-        <p14:creationId xmlns:p14="http://schemas.microsoft.com/office/powerpoint/2010/main" val="1142466811"/>
+        <p14:creationId xmlns:p14="http://schemas.microsoft.com/office/powerpoint/2010/main" val="2033747550"/>
       </p:ext>
     </p:extLst>
   </p:cSld>
@@ -5173,7 +5173,7 @@
     </p:spTree>
     <p:extLst>
       <p:ext uri="{BB962C8B-B14F-4D97-AF65-F5344CB8AC3E}">
-        <p14:creationId xmlns:p14="http://schemas.microsoft.com/office/powerpoint/2010/main" val="2994815580"/>
+        <p14:creationId xmlns:p14="http://schemas.microsoft.com/office/powerpoint/2010/main" val="2904651431"/>
       </p:ext>
     </p:extLst>
   </p:cSld>
@@ -5429,7 +5429,7 @@
     </p:spTree>
     <p:extLst>
       <p:ext uri="{BB962C8B-B14F-4D97-AF65-F5344CB8AC3E}">
-        <p14:creationId xmlns:p14="http://schemas.microsoft.com/office/powerpoint/2010/main" val="1045812137"/>
+        <p14:creationId xmlns:p14="http://schemas.microsoft.com/office/powerpoint/2010/main" val="2825268485"/>
       </p:ext>
     </p:extLst>
   </p:cSld>
@@ -5513,7 +5513,7 @@
     </p:spTree>
     <p:extLst>
       <p:ext uri="{BB962C8B-B14F-4D97-AF65-F5344CB8AC3E}">
-        <p14:creationId xmlns:p14="http://schemas.microsoft.com/office/powerpoint/2010/main" val="1969996952"/>
+        <p14:creationId xmlns:p14="http://schemas.microsoft.com/office/powerpoint/2010/main" val="1840339718"/>
       </p:ext>
     </p:extLst>
   </p:cSld>
@@ -5756,7 +5756,7 @@
     </p:spTree>
     <p:extLst>
       <p:ext uri="{BB962C8B-B14F-4D97-AF65-F5344CB8AC3E}">
-        <p14:creationId xmlns:p14="http://schemas.microsoft.com/office/powerpoint/2010/main" val="3759343101"/>
+        <p14:creationId xmlns:p14="http://schemas.microsoft.com/office/powerpoint/2010/main" val="4283445002"/>
       </p:ext>
     </p:extLst>
   </p:cSld>
@@ -7788,7 +7788,7 @@
     </p:spTree>
     <p:extLst>
       <p:ext uri="{BB962C8B-B14F-4D97-AF65-F5344CB8AC3E}">
-        <p14:creationId xmlns:p14="http://schemas.microsoft.com/office/powerpoint/2010/main" val="1164674089"/>
+        <p14:creationId xmlns:p14="http://schemas.microsoft.com/office/powerpoint/2010/main" val="333584335"/>
       </p:ext>
     </p:extLst>
   </p:cSld>
@@ -10109,7 +10109,7 @@
     </p:spTree>
     <p:extLst>
       <p:ext uri="{BB962C8B-B14F-4D97-AF65-F5344CB8AC3E}">
-        <p14:creationId xmlns:p14="http://schemas.microsoft.com/office/powerpoint/2010/main" val="3749405722"/>
+        <p14:creationId xmlns:p14="http://schemas.microsoft.com/office/powerpoint/2010/main" val="2982959180"/>
       </p:ext>
     </p:extLst>
   </p:cSld>
@@ -11698,7 +11698,7 @@
     </p:spTree>
     <p:extLst>
       <p:ext uri="{BB962C8B-B14F-4D97-AF65-F5344CB8AC3E}">
-        <p14:creationId xmlns:p14="http://schemas.microsoft.com/office/powerpoint/2010/main" val="1317386393"/>
+        <p14:creationId xmlns:p14="http://schemas.microsoft.com/office/powerpoint/2010/main" val="2512769007"/>
       </p:ext>
     </p:extLst>
   </p:cSld>
@@ -12780,7 +12780,7 @@
     </p:spTree>
     <p:extLst>
       <p:ext uri="{BB962C8B-B14F-4D97-AF65-F5344CB8AC3E}">
-        <p14:creationId xmlns:p14="http://schemas.microsoft.com/office/powerpoint/2010/main" val="3482579596"/>
+        <p14:creationId xmlns:p14="http://schemas.microsoft.com/office/powerpoint/2010/main" val="4131278095"/>
       </p:ext>
     </p:extLst>
   </p:cSld>
@@ -13784,7 +13784,7 @@
     </p:spTree>
     <p:extLst>
       <p:ext uri="{BB962C8B-B14F-4D97-AF65-F5344CB8AC3E}">
-        <p14:creationId xmlns:p14="http://schemas.microsoft.com/office/powerpoint/2010/main" val="3036933855"/>
+        <p14:creationId xmlns:p14="http://schemas.microsoft.com/office/powerpoint/2010/main" val="751721816"/>
       </p:ext>
     </p:extLst>
   </p:cSld>
@@ -14009,7 +14009,7 @@
     </p:spTree>
     <p:extLst>
       <p:ext uri="{BB962C8B-B14F-4D97-AF65-F5344CB8AC3E}">
-        <p14:creationId xmlns:p14="http://schemas.microsoft.com/office/powerpoint/2010/main" val="3432986911"/>
+        <p14:creationId xmlns:p14="http://schemas.microsoft.com/office/powerpoint/2010/main" val="756064795"/>
       </p:ext>
     </p:extLst>
   </p:cSld>
@@ -16129,7 +16129,7 @@
     </p:spTree>
     <p:extLst>
       <p:ext uri="{BB962C8B-B14F-4D97-AF65-F5344CB8AC3E}">
-        <p14:creationId xmlns:p14="http://schemas.microsoft.com/office/powerpoint/2010/main" val="3532319560"/>
+        <p14:creationId xmlns:p14="http://schemas.microsoft.com/office/powerpoint/2010/main" val="3205524572"/>
       </p:ext>
     </p:extLst>
   </p:cSld>
@@ -16261,7 +16261,7 @@
     </p:spTree>
     <p:extLst>
       <p:ext uri="{BB962C8B-B14F-4D97-AF65-F5344CB8AC3E}">
-        <p14:creationId xmlns:p14="http://schemas.microsoft.com/office/powerpoint/2010/main" val="2687726921"/>
+        <p14:creationId xmlns:p14="http://schemas.microsoft.com/office/powerpoint/2010/main" val="2067905991"/>
       </p:ext>
     </p:extLst>
   </p:cSld>
@@ -16902,7 +16902,7 @@
     </p:spTree>
     <p:extLst>
       <p:ext uri="{BB962C8B-B14F-4D97-AF65-F5344CB8AC3E}">
-        <p14:creationId xmlns:p14="http://schemas.microsoft.com/office/powerpoint/2010/main" val="2430145873"/>
+        <p14:creationId xmlns:p14="http://schemas.microsoft.com/office/powerpoint/2010/main" val="3771225388"/>
       </p:ext>
     </p:extLst>
   </p:cSld>
@@ -17389,7 +17389,7 @@
     </p:spTree>
     <p:extLst>
       <p:ext uri="{BB962C8B-B14F-4D97-AF65-F5344CB8AC3E}">
-        <p14:creationId xmlns:p14="http://schemas.microsoft.com/office/powerpoint/2010/main" val="1308351785"/>
+        <p14:creationId xmlns:p14="http://schemas.microsoft.com/office/powerpoint/2010/main" val="3893084250"/>
       </p:ext>
     </p:extLst>
   </p:cSld>
@@ -17763,7 +17763,7 @@
     </p:spTree>
     <p:extLst>
       <p:ext uri="{BB962C8B-B14F-4D97-AF65-F5344CB8AC3E}">
-        <p14:creationId xmlns:p14="http://schemas.microsoft.com/office/powerpoint/2010/main" val="123644695"/>
+        <p14:creationId xmlns:p14="http://schemas.microsoft.com/office/powerpoint/2010/main" val="3317995851"/>
       </p:ext>
     </p:extLst>
   </p:cSld>
@@ -21183,7 +21183,7 @@
     </p:spTree>
     <p:extLst>
       <p:ext uri="{BB962C8B-B14F-4D97-AF65-F5344CB8AC3E}">
-        <p14:creationId xmlns:p14="http://schemas.microsoft.com/office/powerpoint/2010/main" val="1716930676"/>
+        <p14:creationId xmlns:p14="http://schemas.microsoft.com/office/powerpoint/2010/main" val="2694291633"/>
       </p:ext>
     </p:extLst>
   </p:cSld>
@@ -21709,7 +21709,7 @@
     </p:spTree>
     <p:extLst>
       <p:ext uri="{BB962C8B-B14F-4D97-AF65-F5344CB8AC3E}">
-        <p14:creationId xmlns:p14="http://schemas.microsoft.com/office/powerpoint/2010/main" val="3090339507"/>
+        <p14:creationId xmlns:p14="http://schemas.microsoft.com/office/powerpoint/2010/main" val="895060125"/>
       </p:ext>
     </p:extLst>
   </p:cSld>
@@ -22280,7 +22280,7 @@
     </p:spTree>
     <p:extLst>
       <p:ext uri="{BB962C8B-B14F-4D97-AF65-F5344CB8AC3E}">
-        <p14:creationId xmlns:p14="http://schemas.microsoft.com/office/powerpoint/2010/main" val="4039397535"/>
+        <p14:creationId xmlns:p14="http://schemas.microsoft.com/office/powerpoint/2010/main" val="2396573687"/>
       </p:ext>
     </p:extLst>
   </p:cSld>
@@ -22532,7 +22532,7 @@
     </p:spTree>
     <p:extLst>
       <p:ext uri="{BB962C8B-B14F-4D97-AF65-F5344CB8AC3E}">
-        <p14:creationId xmlns:p14="http://schemas.microsoft.com/office/powerpoint/2010/main" val="3215792440"/>
+        <p14:creationId xmlns:p14="http://schemas.microsoft.com/office/powerpoint/2010/main" val="3637293434"/>
       </p:ext>
     </p:extLst>
   </p:cSld>
@@ -22757,7 +22757,7 @@
     </p:spTree>
     <p:extLst>
       <p:ext uri="{BB962C8B-B14F-4D97-AF65-F5344CB8AC3E}">
-        <p14:creationId xmlns:p14="http://schemas.microsoft.com/office/powerpoint/2010/main" val="4095545085"/>
+        <p14:creationId xmlns:p14="http://schemas.microsoft.com/office/powerpoint/2010/main" val="3959953112"/>
       </p:ext>
     </p:extLst>
   </p:cSld>
@@ -23464,7 +23464,7 @@
     </p:spTree>
     <p:extLst>
       <p:ext uri="{BB962C8B-B14F-4D97-AF65-F5344CB8AC3E}">
-        <p14:creationId xmlns:p14="http://schemas.microsoft.com/office/powerpoint/2010/main" val="3557379486"/>
+        <p14:creationId xmlns:p14="http://schemas.microsoft.com/office/powerpoint/2010/main" val="2948102398"/>
       </p:ext>
     </p:extLst>
   </p:cSld>
@@ -24744,7 +24744,7 @@
     </p:spTree>
     <p:extLst>
       <p:ext uri="{BB962C8B-B14F-4D97-AF65-F5344CB8AC3E}">
-        <p14:creationId xmlns:p14="http://schemas.microsoft.com/office/powerpoint/2010/main" val="1858091092"/>
+        <p14:creationId xmlns:p14="http://schemas.microsoft.com/office/powerpoint/2010/main" val="3084909817"/>
       </p:ext>
     </p:extLst>
   </p:cSld>
@@ -26115,7 +26115,7 @@
     </p:spTree>
     <p:extLst>
       <p:ext uri="{BB962C8B-B14F-4D97-AF65-F5344CB8AC3E}">
-        <p14:creationId xmlns:p14="http://schemas.microsoft.com/office/powerpoint/2010/main" val="719055057"/>
+        <p14:creationId xmlns:p14="http://schemas.microsoft.com/office/powerpoint/2010/main" val="3165921232"/>
       </p:ext>
     </p:extLst>
   </p:cSld>
@@ -26891,7 +26891,7 @@
     </p:spTree>
     <p:extLst>
       <p:ext uri="{BB962C8B-B14F-4D97-AF65-F5344CB8AC3E}">
-        <p14:creationId xmlns:p14="http://schemas.microsoft.com/office/powerpoint/2010/main" val="2387673388"/>
+        <p14:creationId xmlns:p14="http://schemas.microsoft.com/office/powerpoint/2010/main" val="4016620834"/>
       </p:ext>
     </p:extLst>
   </p:cSld>
@@ -27192,7 +27192,7 @@
     </p:spTree>
     <p:extLst>
       <p:ext uri="{BB962C8B-B14F-4D97-AF65-F5344CB8AC3E}">
-        <p14:creationId xmlns:p14="http://schemas.microsoft.com/office/powerpoint/2010/main" val="2294035863"/>
+        <p14:creationId xmlns:p14="http://schemas.microsoft.com/office/powerpoint/2010/main" val="2501725621"/>
       </p:ext>
     </p:extLst>
   </p:cSld>
@@ -29063,7 +29063,7 @@
     </p:spTree>
     <p:extLst>
       <p:ext uri="{BB962C8B-B14F-4D97-AF65-F5344CB8AC3E}">
-        <p14:creationId xmlns:p14="http://schemas.microsoft.com/office/powerpoint/2010/main" val="1102258696"/>
+        <p14:creationId xmlns:p14="http://schemas.microsoft.com/office/powerpoint/2010/main" val="2900561468"/>
       </p:ext>
     </p:extLst>
   </p:cSld>

--- a/examples/overview/build/overview_merged.pptx
+++ b/examples/overview/build/overview_merged.pptx
@@ -259,7 +259,7 @@
           <a:p>
             <a:fld id="{294670BC-B8C6-44A7-84E1-23632D8FD86F}" type="datetimeFigureOut">
               <a:rPr kumimoji="1" lang="ja-JP" altLang="en-US" smtClean="0"/>
-              <a:t>2026/6/6</a:t>
+              <a:t>2026/6/8</a:t>
             </a:fld>
             <a:endParaRPr kumimoji="1" lang="ja-JP" altLang="en-US"/>
           </a:p>
@@ -632,7 +632,7 @@
     </p:spTree>
     <p:extLst>
       <p:ext uri="{BB962C8B-B14F-4D97-AF65-F5344CB8AC3E}">
-        <p14:creationId xmlns:p14="http://schemas.microsoft.com/office/powerpoint/2010/main" val="2014503563"/>
+        <p14:creationId xmlns:p14="http://schemas.microsoft.com/office/powerpoint/2010/main" val="4004900101"/>
       </p:ext>
     </p:extLst>
   </p:cSld>
@@ -875,7 +875,7 @@
     </p:spTree>
     <p:extLst>
       <p:ext uri="{BB962C8B-B14F-4D97-AF65-F5344CB8AC3E}">
-        <p14:creationId xmlns:p14="http://schemas.microsoft.com/office/powerpoint/2010/main" val="2707100404"/>
+        <p14:creationId xmlns:p14="http://schemas.microsoft.com/office/powerpoint/2010/main" val="172015986"/>
       </p:ext>
     </p:extLst>
   </p:cSld>
@@ -1110,7 +1110,7 @@
     </p:spTree>
     <p:extLst>
       <p:ext uri="{BB962C8B-B14F-4D97-AF65-F5344CB8AC3E}">
-        <p14:creationId xmlns:p14="http://schemas.microsoft.com/office/powerpoint/2010/main" val="2851158432"/>
+        <p14:creationId xmlns:p14="http://schemas.microsoft.com/office/powerpoint/2010/main" val="1969612505"/>
       </p:ext>
     </p:extLst>
   </p:cSld>
@@ -1345,7 +1345,7 @@
     </p:spTree>
     <p:extLst>
       <p:ext uri="{BB962C8B-B14F-4D97-AF65-F5344CB8AC3E}">
-        <p14:creationId xmlns:p14="http://schemas.microsoft.com/office/powerpoint/2010/main" val="2429889435"/>
+        <p14:creationId xmlns:p14="http://schemas.microsoft.com/office/powerpoint/2010/main" val="3802282213"/>
       </p:ext>
     </p:extLst>
   </p:cSld>
@@ -1596,7 +1596,7 @@
     </p:spTree>
     <p:extLst>
       <p:ext uri="{BB962C8B-B14F-4D97-AF65-F5344CB8AC3E}">
-        <p14:creationId xmlns:p14="http://schemas.microsoft.com/office/powerpoint/2010/main" val="1486169010"/>
+        <p14:creationId xmlns:p14="http://schemas.microsoft.com/office/powerpoint/2010/main" val="2032038179"/>
       </p:ext>
     </p:extLst>
   </p:cSld>
@@ -1680,7 +1680,7 @@
     </p:spTree>
     <p:extLst>
       <p:ext uri="{BB962C8B-B14F-4D97-AF65-F5344CB8AC3E}">
-        <p14:creationId xmlns:p14="http://schemas.microsoft.com/office/powerpoint/2010/main" val="2425994446"/>
+        <p14:creationId xmlns:p14="http://schemas.microsoft.com/office/powerpoint/2010/main" val="2030926316"/>
       </p:ext>
     </p:extLst>
   </p:cSld>
@@ -1896,7 +1896,7 @@
     </p:spTree>
     <p:extLst>
       <p:ext uri="{BB962C8B-B14F-4D97-AF65-F5344CB8AC3E}">
-        <p14:creationId xmlns:p14="http://schemas.microsoft.com/office/powerpoint/2010/main" val="3285141661"/>
+        <p14:creationId xmlns:p14="http://schemas.microsoft.com/office/powerpoint/2010/main" val="1728867371"/>
       </p:ext>
     </p:extLst>
   </p:cSld>
@@ -1980,7 +1980,7 @@
     </p:spTree>
     <p:extLst>
       <p:ext uri="{BB962C8B-B14F-4D97-AF65-F5344CB8AC3E}">
-        <p14:creationId xmlns:p14="http://schemas.microsoft.com/office/powerpoint/2010/main" val="1414844486"/>
+        <p14:creationId xmlns:p14="http://schemas.microsoft.com/office/powerpoint/2010/main" val="2109210048"/>
       </p:ext>
     </p:extLst>
   </p:cSld>
@@ -2277,7 +2277,7 @@
     </p:spTree>
     <p:extLst>
       <p:ext uri="{BB962C8B-B14F-4D97-AF65-F5344CB8AC3E}">
-        <p14:creationId xmlns:p14="http://schemas.microsoft.com/office/powerpoint/2010/main" val="2393990553"/>
+        <p14:creationId xmlns:p14="http://schemas.microsoft.com/office/powerpoint/2010/main" val="4013742418"/>
       </p:ext>
     </p:extLst>
   </p:cSld>
@@ -2600,7 +2600,7 @@
     </p:spTree>
     <p:extLst>
       <p:ext uri="{BB962C8B-B14F-4D97-AF65-F5344CB8AC3E}">
-        <p14:creationId xmlns:p14="http://schemas.microsoft.com/office/powerpoint/2010/main" val="3508612804"/>
+        <p14:creationId xmlns:p14="http://schemas.microsoft.com/office/powerpoint/2010/main" val="271939197"/>
       </p:ext>
     </p:extLst>
   </p:cSld>
@@ -2821,7 +2821,7 @@
     </p:spTree>
     <p:extLst>
       <p:ext uri="{BB962C8B-B14F-4D97-AF65-F5344CB8AC3E}">
-        <p14:creationId xmlns:p14="http://schemas.microsoft.com/office/powerpoint/2010/main" val="3074624130"/>
+        <p14:creationId xmlns:p14="http://schemas.microsoft.com/office/powerpoint/2010/main" val="853096333"/>
       </p:ext>
     </p:extLst>
   </p:cSld>
@@ -3083,7 +3083,7 @@
     </p:spTree>
     <p:extLst>
       <p:ext uri="{BB962C8B-B14F-4D97-AF65-F5344CB8AC3E}">
-        <p14:creationId xmlns:p14="http://schemas.microsoft.com/office/powerpoint/2010/main" val="1596402002"/>
+        <p14:creationId xmlns:p14="http://schemas.microsoft.com/office/powerpoint/2010/main" val="2885972351"/>
       </p:ext>
     </p:extLst>
   </p:cSld>
@@ -3327,7 +3327,7 @@
     </p:spTree>
     <p:extLst>
       <p:ext uri="{BB962C8B-B14F-4D97-AF65-F5344CB8AC3E}">
-        <p14:creationId xmlns:p14="http://schemas.microsoft.com/office/powerpoint/2010/main" val="1607471164"/>
+        <p14:creationId xmlns:p14="http://schemas.microsoft.com/office/powerpoint/2010/main" val="1140441681"/>
       </p:ext>
     </p:extLst>
   </p:cSld>
@@ -3574,7 +3574,7 @@
     </p:spTree>
     <p:extLst>
       <p:ext uri="{BB962C8B-B14F-4D97-AF65-F5344CB8AC3E}">
-        <p14:creationId xmlns:p14="http://schemas.microsoft.com/office/powerpoint/2010/main" val="2875019006"/>
+        <p14:creationId xmlns:p14="http://schemas.microsoft.com/office/powerpoint/2010/main" val="3401405248"/>
       </p:ext>
     </p:extLst>
   </p:cSld>
@@ -4336,7 +4336,7 @@
     </p:spTree>
     <p:extLst>
       <p:ext uri="{BB962C8B-B14F-4D97-AF65-F5344CB8AC3E}">
-        <p14:creationId xmlns:p14="http://schemas.microsoft.com/office/powerpoint/2010/main" val="1885675830"/>
+        <p14:creationId xmlns:p14="http://schemas.microsoft.com/office/powerpoint/2010/main" val="698199386"/>
       </p:ext>
     </p:extLst>
   </p:cSld>
@@ -4420,7 +4420,7 @@
     </p:spTree>
     <p:extLst>
       <p:ext uri="{BB962C8B-B14F-4D97-AF65-F5344CB8AC3E}">
-        <p14:creationId xmlns:p14="http://schemas.microsoft.com/office/powerpoint/2010/main" val="1161217434"/>
+        <p14:creationId xmlns:p14="http://schemas.microsoft.com/office/powerpoint/2010/main" val="3404251208"/>
       </p:ext>
     </p:extLst>
   </p:cSld>
@@ -4679,7 +4679,7 @@
     </p:spTree>
     <p:extLst>
       <p:ext uri="{BB962C8B-B14F-4D97-AF65-F5344CB8AC3E}">
-        <p14:creationId xmlns:p14="http://schemas.microsoft.com/office/powerpoint/2010/main" val="1838537098"/>
+        <p14:creationId xmlns:p14="http://schemas.microsoft.com/office/powerpoint/2010/main" val="3209804598"/>
       </p:ext>
     </p:extLst>
   </p:cSld>
@@ -4938,7 +4938,7 @@
     </p:spTree>
     <p:extLst>
       <p:ext uri="{BB962C8B-B14F-4D97-AF65-F5344CB8AC3E}">
-        <p14:creationId xmlns:p14="http://schemas.microsoft.com/office/powerpoint/2010/main" val="2033747550"/>
+        <p14:creationId xmlns:p14="http://schemas.microsoft.com/office/powerpoint/2010/main" val="3506512496"/>
       </p:ext>
     </p:extLst>
   </p:cSld>
@@ -5173,7 +5173,7 @@
     </p:spTree>
     <p:extLst>
       <p:ext uri="{BB962C8B-B14F-4D97-AF65-F5344CB8AC3E}">
-        <p14:creationId xmlns:p14="http://schemas.microsoft.com/office/powerpoint/2010/main" val="2904651431"/>
+        <p14:creationId xmlns:p14="http://schemas.microsoft.com/office/powerpoint/2010/main" val="4289023454"/>
       </p:ext>
     </p:extLst>
   </p:cSld>
@@ -5429,7 +5429,7 @@
     </p:spTree>
     <p:extLst>
       <p:ext uri="{BB962C8B-B14F-4D97-AF65-F5344CB8AC3E}">
-        <p14:creationId xmlns:p14="http://schemas.microsoft.com/office/powerpoint/2010/main" val="2825268485"/>
+        <p14:creationId xmlns:p14="http://schemas.microsoft.com/office/powerpoint/2010/main" val="1057408990"/>
       </p:ext>
     </p:extLst>
   </p:cSld>
@@ -5513,7 +5513,7 @@
     </p:spTree>
     <p:extLst>
       <p:ext uri="{BB962C8B-B14F-4D97-AF65-F5344CB8AC3E}">
-        <p14:creationId xmlns:p14="http://schemas.microsoft.com/office/powerpoint/2010/main" val="1840339718"/>
+        <p14:creationId xmlns:p14="http://schemas.microsoft.com/office/powerpoint/2010/main" val="2915212118"/>
       </p:ext>
     </p:extLst>
   </p:cSld>
@@ -5756,7 +5756,7 @@
     </p:spTree>
     <p:extLst>
       <p:ext uri="{BB962C8B-B14F-4D97-AF65-F5344CB8AC3E}">
-        <p14:creationId xmlns:p14="http://schemas.microsoft.com/office/powerpoint/2010/main" val="4283445002"/>
+        <p14:creationId xmlns:p14="http://schemas.microsoft.com/office/powerpoint/2010/main" val="4201942832"/>
       </p:ext>
     </p:extLst>
   </p:cSld>
@@ -7788,7 +7788,7 @@
     </p:spTree>
     <p:extLst>
       <p:ext uri="{BB962C8B-B14F-4D97-AF65-F5344CB8AC3E}">
-        <p14:creationId xmlns:p14="http://schemas.microsoft.com/office/powerpoint/2010/main" val="333584335"/>
+        <p14:creationId xmlns:p14="http://schemas.microsoft.com/office/powerpoint/2010/main" val="4214009015"/>
       </p:ext>
     </p:extLst>
   </p:cSld>
@@ -10109,7 +10109,7 @@
     </p:spTree>
     <p:extLst>
       <p:ext uri="{BB962C8B-B14F-4D97-AF65-F5344CB8AC3E}">
-        <p14:creationId xmlns:p14="http://schemas.microsoft.com/office/powerpoint/2010/main" val="2982959180"/>
+        <p14:creationId xmlns:p14="http://schemas.microsoft.com/office/powerpoint/2010/main" val="3904894356"/>
       </p:ext>
     </p:extLst>
   </p:cSld>
@@ -11698,7 +11698,7 @@
     </p:spTree>
     <p:extLst>
       <p:ext uri="{BB962C8B-B14F-4D97-AF65-F5344CB8AC3E}">
-        <p14:creationId xmlns:p14="http://schemas.microsoft.com/office/powerpoint/2010/main" val="2512769007"/>
+        <p14:creationId xmlns:p14="http://schemas.microsoft.com/office/powerpoint/2010/main" val="1309752895"/>
       </p:ext>
     </p:extLst>
   </p:cSld>
@@ -12780,7 +12780,7 @@
     </p:spTree>
     <p:extLst>
       <p:ext uri="{BB962C8B-B14F-4D97-AF65-F5344CB8AC3E}">
-        <p14:creationId xmlns:p14="http://schemas.microsoft.com/office/powerpoint/2010/main" val="4131278095"/>
+        <p14:creationId xmlns:p14="http://schemas.microsoft.com/office/powerpoint/2010/main" val="3140531066"/>
       </p:ext>
     </p:extLst>
   </p:cSld>
@@ -13784,7 +13784,7 @@
     </p:spTree>
     <p:extLst>
       <p:ext uri="{BB962C8B-B14F-4D97-AF65-F5344CB8AC3E}">
-        <p14:creationId xmlns:p14="http://schemas.microsoft.com/office/powerpoint/2010/main" val="751721816"/>
+        <p14:creationId xmlns:p14="http://schemas.microsoft.com/office/powerpoint/2010/main" val="1299590433"/>
       </p:ext>
     </p:extLst>
   </p:cSld>
@@ -14009,7 +14009,7 @@
     </p:spTree>
     <p:extLst>
       <p:ext uri="{BB962C8B-B14F-4D97-AF65-F5344CB8AC3E}">
-        <p14:creationId xmlns:p14="http://schemas.microsoft.com/office/powerpoint/2010/main" val="756064795"/>
+        <p14:creationId xmlns:p14="http://schemas.microsoft.com/office/powerpoint/2010/main" val="4012300337"/>
       </p:ext>
     </p:extLst>
   </p:cSld>
@@ -16129,7 +16129,7 @@
     </p:spTree>
     <p:extLst>
       <p:ext uri="{BB962C8B-B14F-4D97-AF65-F5344CB8AC3E}">
-        <p14:creationId xmlns:p14="http://schemas.microsoft.com/office/powerpoint/2010/main" val="3205524572"/>
+        <p14:creationId xmlns:p14="http://schemas.microsoft.com/office/powerpoint/2010/main" val="1880027926"/>
       </p:ext>
     </p:extLst>
   </p:cSld>
@@ -16261,7 +16261,7 @@
     </p:spTree>
     <p:extLst>
       <p:ext uri="{BB962C8B-B14F-4D97-AF65-F5344CB8AC3E}">
-        <p14:creationId xmlns:p14="http://schemas.microsoft.com/office/powerpoint/2010/main" val="2067905991"/>
+        <p14:creationId xmlns:p14="http://schemas.microsoft.com/office/powerpoint/2010/main" val="3303233921"/>
       </p:ext>
     </p:extLst>
   </p:cSld>
@@ -16902,7 +16902,7 @@
     </p:spTree>
     <p:extLst>
       <p:ext uri="{BB962C8B-B14F-4D97-AF65-F5344CB8AC3E}">
-        <p14:creationId xmlns:p14="http://schemas.microsoft.com/office/powerpoint/2010/main" val="3771225388"/>
+        <p14:creationId xmlns:p14="http://schemas.microsoft.com/office/powerpoint/2010/main" val="128871749"/>
       </p:ext>
     </p:extLst>
   </p:cSld>
@@ -17389,7 +17389,7 @@
     </p:spTree>
     <p:extLst>
       <p:ext uri="{BB962C8B-B14F-4D97-AF65-F5344CB8AC3E}">
-        <p14:creationId xmlns:p14="http://schemas.microsoft.com/office/powerpoint/2010/main" val="3893084250"/>
+        <p14:creationId xmlns:p14="http://schemas.microsoft.com/office/powerpoint/2010/main" val="2559111803"/>
       </p:ext>
     </p:extLst>
   </p:cSld>
@@ -17763,7 +17763,7 @@
     </p:spTree>
     <p:extLst>
       <p:ext uri="{BB962C8B-B14F-4D97-AF65-F5344CB8AC3E}">
-        <p14:creationId xmlns:p14="http://schemas.microsoft.com/office/powerpoint/2010/main" val="3317995851"/>
+        <p14:creationId xmlns:p14="http://schemas.microsoft.com/office/powerpoint/2010/main" val="4040354816"/>
       </p:ext>
     </p:extLst>
   </p:cSld>
@@ -21183,7 +21183,7 @@
     </p:spTree>
     <p:extLst>
       <p:ext uri="{BB962C8B-B14F-4D97-AF65-F5344CB8AC3E}">
-        <p14:creationId xmlns:p14="http://schemas.microsoft.com/office/powerpoint/2010/main" val="2694291633"/>
+        <p14:creationId xmlns:p14="http://schemas.microsoft.com/office/powerpoint/2010/main" val="1481549738"/>
       </p:ext>
     </p:extLst>
   </p:cSld>
@@ -21709,7 +21709,7 @@
     </p:spTree>
     <p:extLst>
       <p:ext uri="{BB962C8B-B14F-4D97-AF65-F5344CB8AC3E}">
-        <p14:creationId xmlns:p14="http://schemas.microsoft.com/office/powerpoint/2010/main" val="895060125"/>
+        <p14:creationId xmlns:p14="http://schemas.microsoft.com/office/powerpoint/2010/main" val="3151814559"/>
       </p:ext>
     </p:extLst>
   </p:cSld>
@@ -22280,7 +22280,7 @@
     </p:spTree>
     <p:extLst>
       <p:ext uri="{BB962C8B-B14F-4D97-AF65-F5344CB8AC3E}">
-        <p14:creationId xmlns:p14="http://schemas.microsoft.com/office/powerpoint/2010/main" val="2396573687"/>
+        <p14:creationId xmlns:p14="http://schemas.microsoft.com/office/powerpoint/2010/main" val="2389980110"/>
       </p:ext>
     </p:extLst>
   </p:cSld>
@@ -22532,7 +22532,7 @@
     </p:spTree>
     <p:extLst>
       <p:ext uri="{BB962C8B-B14F-4D97-AF65-F5344CB8AC3E}">
-        <p14:creationId xmlns:p14="http://schemas.microsoft.com/office/powerpoint/2010/main" val="3637293434"/>
+        <p14:creationId xmlns:p14="http://schemas.microsoft.com/office/powerpoint/2010/main" val="3569469936"/>
       </p:ext>
     </p:extLst>
   </p:cSld>
@@ -22757,7 +22757,7 @@
     </p:spTree>
     <p:extLst>
       <p:ext uri="{BB962C8B-B14F-4D97-AF65-F5344CB8AC3E}">
-        <p14:creationId xmlns:p14="http://schemas.microsoft.com/office/powerpoint/2010/main" val="3959953112"/>
+        <p14:creationId xmlns:p14="http://schemas.microsoft.com/office/powerpoint/2010/main" val="3603226431"/>
       </p:ext>
     </p:extLst>
   </p:cSld>
@@ -23464,7 +23464,7 @@
     </p:spTree>
     <p:extLst>
       <p:ext uri="{BB962C8B-B14F-4D97-AF65-F5344CB8AC3E}">
-        <p14:creationId xmlns:p14="http://schemas.microsoft.com/office/powerpoint/2010/main" val="2948102398"/>
+        <p14:creationId xmlns:p14="http://schemas.microsoft.com/office/powerpoint/2010/main" val="1039112535"/>
       </p:ext>
     </p:extLst>
   </p:cSld>
@@ -24744,7 +24744,7 @@
     </p:spTree>
     <p:extLst>
       <p:ext uri="{BB962C8B-B14F-4D97-AF65-F5344CB8AC3E}">
-        <p14:creationId xmlns:p14="http://schemas.microsoft.com/office/powerpoint/2010/main" val="3084909817"/>
+        <p14:creationId xmlns:p14="http://schemas.microsoft.com/office/powerpoint/2010/main" val="3684832986"/>
       </p:ext>
     </p:extLst>
   </p:cSld>
@@ -26115,7 +26115,7 @@
     </p:spTree>
     <p:extLst>
       <p:ext uri="{BB962C8B-B14F-4D97-AF65-F5344CB8AC3E}">
-        <p14:creationId xmlns:p14="http://schemas.microsoft.com/office/powerpoint/2010/main" val="3165921232"/>
+        <p14:creationId xmlns:p14="http://schemas.microsoft.com/office/powerpoint/2010/main" val="1235336442"/>
       </p:ext>
     </p:extLst>
   </p:cSld>
@@ -26891,7 +26891,7 @@
     </p:spTree>
     <p:extLst>
       <p:ext uri="{BB962C8B-B14F-4D97-AF65-F5344CB8AC3E}">
-        <p14:creationId xmlns:p14="http://schemas.microsoft.com/office/powerpoint/2010/main" val="4016620834"/>
+        <p14:creationId xmlns:p14="http://schemas.microsoft.com/office/powerpoint/2010/main" val="399887648"/>
       </p:ext>
     </p:extLst>
   </p:cSld>
@@ -27192,7 +27192,7 @@
     </p:spTree>
     <p:extLst>
       <p:ext uri="{BB962C8B-B14F-4D97-AF65-F5344CB8AC3E}">
-        <p14:creationId xmlns:p14="http://schemas.microsoft.com/office/powerpoint/2010/main" val="2501725621"/>
+        <p14:creationId xmlns:p14="http://schemas.microsoft.com/office/powerpoint/2010/main" val="1594484205"/>
       </p:ext>
     </p:extLst>
   </p:cSld>
@@ -29063,7 +29063,7 @@
     </p:spTree>
     <p:extLst>
       <p:ext uri="{BB962C8B-B14F-4D97-AF65-F5344CB8AC3E}">
-        <p14:creationId xmlns:p14="http://schemas.microsoft.com/office/powerpoint/2010/main" val="2900561468"/>
+        <p14:creationId xmlns:p14="http://schemas.microsoft.com/office/powerpoint/2010/main" val="3401361700"/>
       </p:ext>
     </p:extLst>
   </p:cSld>
